--- a/docs/materials/htcondor/files/osgs26-intro-to-worksheet.pptx
+++ b/docs/materials/htcondor/files/osgs26-intro-to-worksheet.pptx
@@ -201,7 +201,7 @@
           <a:p>
             <a:fld id="{2AEBBA53-B5BE-E248-AF58-61B76F9411E7}" type="datetimeFigureOut">
               <a:rPr lang="en-US" smtClean="0"/>
-              <a:t>7/11/26</a:t>
+              <a:t>7/12/26</a:t>
             </a:fld>
             <a:endParaRPr lang="en-US"/>
           </a:p>
